--- a/content/decks/media-studies/media-studies-s1-lesson-04-genre-and-camera.pptx
+++ b/content/decks/media-studies/media-studies-s1-lesson-04-genre-and-camera.pptx
@@ -16,9 +16,10 @@
     <p:sldId id="264" r:id="rId10"/>
     <p:sldId id="265" r:id="rId11"/>
     <p:sldId id="266" r:id="rId12"/>
+    <p:sldId id="267" r:id="rId13"/>
   </p:sldIdLst>
   <p:notesMasterIdLst>
-    <p:notesMasterId r:id="rId13"/>
+    <p:notesMasterId r:id="rId14"/>
   </p:notesMasterIdLst>
   <p:sldSz cx="12192000" cy="6858000"/>
   <p:notesSz cx="6858000" cy="12192000"/>
@@ -688,7 +689,7 @@
           <a:p>
             <a:r>
               <a:rPr lang="en-US" dirty="0"/>
-              <a:t/>
+              <a:t>Three stations, about seven minutes each, in production groups. The point is that the failure is audible or visible in the room rather than described. Close by collecting the equipment decision: school sign-out slips go to the equipment room before Mid-Autumn, and the choice is re-confirmed at the L05 lock so the shootability checklist points at a kit the group has actually tested.</a:t>
             </a:r>
             <a:endParaRPr lang="en-US" dirty="0"/>
           </a:p>
@@ -712,6 +713,94 @@
             <a:fld id="{F7021451-1387-4CA6-816F-3879F97B5CBC}" type="slidenum">
               <a:rPr lang="en-US"/>
               <a:t>11</a:t>
+            </a:fld>
+            <a:endParaRPr lang="en-US"/>
+          </a:p>
+        </p:txBody>
+      </p:sp>
+    </p:spTree>
+    <p:extLst>
+      <p:ext uri="{BB962C8B-B14F-4D97-AF65-F5344CB8AC3E}">
+        <p14:creationId xmlns:p14="http://schemas.microsoft.com/office/powerpoint/2010/main" val="1024086991"/>
+      </p:ext>
+    </p:extLst>
+  </p:cSld>
+  <p:clrMapOvr>
+    <a:masterClrMapping/>
+  </p:clrMapOvr>
+</p:notes>
+</file>
+
+<file path=ppt/notesSlides/notesSlide12.xml><?xml version="1.0" encoding="utf-8"?>
+<p:notes xmlns:a="http://schemas.openxmlformats.org/drawingml/2006/main" xmlns:r="http://schemas.openxmlformats.org/officeDocument/2006/relationships" xmlns:p="http://schemas.openxmlformats.org/presentationml/2006/main">
+  <p:cSld>
+    <p:spTree>
+      <p:nvGrpSpPr>
+        <p:cNvPr id="1" name=""/>
+        <p:cNvGrpSpPr/>
+        <p:nvPr/>
+      </p:nvGrpSpPr>
+      <p:grpSpPr>
+        <a:xfrm>
+          <a:off x="0" y="0"/>
+          <a:ext cx="0" cy="0"/>
+          <a:chOff x="0" y="0"/>
+          <a:chExt cx="0" cy="0"/>
+        </a:xfrm>
+      </p:grpSpPr>
+      <p:sp>
+        <p:nvSpPr>
+          <p:cNvPr id="2" name="Slide Image Placeholder 1"/>
+          <p:cNvSpPr>
+            <a:spLocks noGrp="1" noRot="1" noChangeAspect="1"/>
+          </p:cNvSpPr>
+          <p:nvPr>
+            <p:ph type="sldImg"/>
+          </p:nvPr>
+        </p:nvSpPr>
+        <p:spPr/>
+      </p:sp>
+      <p:sp>
+        <p:nvSpPr>
+          <p:cNvPr id="3" name="Notes Placeholder 2"/>
+          <p:cNvSpPr>
+            <a:spLocks noGrp="1"/>
+          </p:cNvSpPr>
+          <p:nvPr>
+            <p:ph type="body" idx="1"/>
+          </p:nvPr>
+        </p:nvSpPr>
+        <p:spPr/>
+        <p:txBody>
+          <a:bodyPr/>
+          <a:lstStyle/>
+          <a:p>
+            <a:r>
+              <a:rPr lang="en-US" dirty="0"/>
+              <a:t/>
+            </a:r>
+            <a:endParaRPr lang="en-US" dirty="0"/>
+          </a:p>
+        </p:txBody>
+      </p:sp>
+      <p:sp>
+        <p:nvSpPr>
+          <p:cNvPr id="4" name="Slide Number Placeholder 3"/>
+          <p:cNvSpPr>
+            <a:spLocks noGrp="1"/>
+          </p:cNvSpPr>
+          <p:nvPr>
+            <p:ph type="sldNum" sz="quarter" idx="10"/>
+          </p:nvPr>
+        </p:nvSpPr>
+        <p:spPr/>
+        <p:txBody>
+          <a:bodyPr/>
+          <a:lstStyle/>
+          <a:p>
+            <a:fld id="{F7021451-1387-4CA6-816F-3879F97B5CBC}" type="slidenum">
+              <a:rPr lang="en-US"/>
+              <a:t>12</a:t>
             </a:fld>
             <a:endParaRPr lang="en-US"/>
           </a:p>
@@ -2110,7 +2199,7 @@
                 <a:ea typeface="Arial" pitchFamily="34" charset="-122"/>
                 <a:cs typeface="Arial" pitchFamily="34" charset="-120"/>
               </a:rPr>
-              <a:t>WEDNESDAY DOUBLE, THE DRESS REHEARSAL</a:t>
+              <a:t>WEDNESDAY DOUBLE, FIRST HALF</a:t>
             </a:r>
             <a:endParaRPr lang="en-US" sz="1100" dirty="0"/>
           </a:p>
@@ -2394,6 +2483,770 @@
 <file path=ppt/slides/slide11.xml><?xml version="1.0" encoding="utf-8"?>
 <p:sld xmlns:a="http://schemas.openxmlformats.org/drawingml/2006/main" xmlns:r="http://schemas.openxmlformats.org/officeDocument/2006/relationships" xmlns:p="http://schemas.openxmlformats.org/presentationml/2006/main">
   <p:cSld name="Slide 11">
+    <p:bg>
+      <p:bgPr>
+        <a:solidFill>
+          <a:srgbClr val="FAF8F1"/>
+        </a:solidFill>
+      </p:bgPr>
+    </p:bg>
+    <p:spTree>
+      <p:nvGrpSpPr>
+        <p:cNvPr id="1" name=""/>
+        <p:cNvGrpSpPr/>
+        <p:nvPr/>
+      </p:nvGrpSpPr>
+      <p:grpSpPr>
+        <a:xfrm>
+          <a:off x="0" y="0"/>
+          <a:ext cx="0" cy="0"/>
+          <a:chOff x="0" y="0"/>
+          <a:chExt cx="0" cy="0"/>
+        </a:xfrm>
+      </p:grpSpPr>
+      <p:sp>
+        <p:nvSpPr>
+          <p:cNvPr id="2" name="Text 0"/>
+          <p:cNvSpPr/>
+          <p:nvPr/>
+        </p:nvSpPr>
+        <p:spPr>
+          <a:xfrm>
+            <a:off x="822960" y="457200"/>
+            <a:ext cx="6400800" cy="274320"/>
+          </a:xfrm>
+          <a:prstGeom prst="rect">
+            <a:avLst/>
+          </a:prstGeom>
+          <a:noFill/>
+          <a:ln/>
+        </p:spPr>
+        <p:txBody>
+          <a:bodyPr wrap="square" lIns="0" tIns="0" rIns="0" bIns="0" rtlCol="0" anchor="ctr"/>
+          <a:lstStyle/>
+          <a:p>
+            <a:pPr algn="l" indent="0" marL="0">
+              <a:buNone/>
+            </a:pPr>
+            <a:r>
+              <a:rPr lang="en-US" sz="1100" b="1" spc="250" kern="0" dirty="0">
+                <a:solidFill>
+                  <a:srgbClr val="4A6B5D"/>
+                </a:solidFill>
+                <a:latin typeface="Arial" pitchFamily="34" charset="0"/>
+                <a:ea typeface="Arial" pitchFamily="34" charset="-122"/>
+                <a:cs typeface="Arial" pitchFamily="34" charset="-120"/>
+              </a:rPr>
+              <a:t>CAMERAS IN HAND</a:t>
+            </a:r>
+            <a:endParaRPr lang="en-US" sz="1100" dirty="0"/>
+          </a:p>
+        </p:txBody>
+      </p:sp>
+      <p:sp>
+        <p:nvSpPr>
+          <p:cNvPr id="3" name="Text 1"/>
+          <p:cNvSpPr/>
+          <p:nvPr/>
+        </p:nvSpPr>
+        <p:spPr>
+          <a:xfrm>
+            <a:off x="6793992" y="457200"/>
+            <a:ext cx="4572000" cy="274320"/>
+          </a:xfrm>
+          <a:prstGeom prst="rect">
+            <a:avLst/>
+          </a:prstGeom>
+          <a:noFill/>
+          <a:ln/>
+        </p:spPr>
+        <p:txBody>
+          <a:bodyPr wrap="square" lIns="0" tIns="0" rIns="0" bIns="0" rtlCol="0" anchor="ctr"/>
+          <a:lstStyle/>
+          <a:p>
+            <a:pPr algn="r" indent="0" marL="0">
+              <a:buNone/>
+            </a:pPr>
+            <a:r>
+              <a:rPr lang="en-US" sz="1100" b="1" spc="250" kern="0" dirty="0">
+                <a:solidFill>
+                  <a:srgbClr val="7A7F72"/>
+                </a:solidFill>
+                <a:latin typeface="Arial" pitchFamily="34" charset="0"/>
+                <a:ea typeface="Arial" pitchFamily="34" charset="-122"/>
+                <a:cs typeface="Arial" pitchFamily="34" charset="-120"/>
+              </a:rPr>
+              <a:t>THIRTY MINUTES, ONE WEEK OUT</a:t>
+            </a:r>
+            <a:endParaRPr lang="en-US" sz="1100" dirty="0"/>
+          </a:p>
+        </p:txBody>
+      </p:sp>
+      <p:sp>
+        <p:nvSpPr>
+          <p:cNvPr id="4" name="Shape 2"/>
+          <p:cNvSpPr/>
+          <p:nvPr/>
+        </p:nvSpPr>
+        <p:spPr>
+          <a:xfrm>
+            <a:off x="822960" y="786384"/>
+            <a:ext cx="10543032" cy="0"/>
+          </a:xfrm>
+          <a:prstGeom prst="line">
+            <a:avLst/>
+          </a:prstGeom>
+          <a:noFill/>
+          <a:ln w="9525">
+            <a:solidFill>
+              <a:srgbClr val="D9D4C4"/>
+            </a:solidFill>
+            <a:prstDash val="solid"/>
+          </a:ln>
+        </p:spPr>
+      </p:sp>
+      <p:sp>
+        <p:nvSpPr>
+          <p:cNvPr id="5" name="Text 3"/>
+          <p:cNvSpPr/>
+          <p:nvPr/>
+        </p:nvSpPr>
+        <p:spPr>
+          <a:xfrm>
+            <a:off x="822960" y="932688"/>
+            <a:ext cx="10543032" cy="640080"/>
+          </a:xfrm>
+          <a:prstGeom prst="rect">
+            <a:avLst/>
+          </a:prstGeom>
+          <a:noFill/>
+          <a:ln/>
+        </p:spPr>
+        <p:txBody>
+          <a:bodyPr wrap="square" lIns="0" tIns="0" rIns="0" bIns="0" rtlCol="0" anchor="ctr"/>
+          <a:lstStyle/>
+          <a:p>
+            <a:pPr indent="0" marL="0">
+              <a:buNone/>
+            </a:pPr>
+            <a:r>
+              <a:rPr lang="en-US" sz="3200" dirty="0">
+                <a:solidFill>
+                  <a:srgbClr val="24313F"/>
+                </a:solidFill>
+                <a:latin typeface="Georgia" pitchFamily="34" charset="0"/>
+                <a:ea typeface="Georgia" pitchFamily="34" charset="-122"/>
+                <a:cs typeface="Georgia" pitchFamily="34" charset="-120"/>
+              </a:rPr>
+              <a:t>The three that kill student footage</a:t>
+            </a:r>
+            <a:endParaRPr lang="en-US" sz="3200" dirty="0"/>
+          </a:p>
+        </p:txBody>
+      </p:sp>
+      <p:sp>
+        <p:nvSpPr>
+          <p:cNvPr id="6" name="Text 4"/>
+          <p:cNvSpPr/>
+          <p:nvPr/>
+        </p:nvSpPr>
+        <p:spPr>
+          <a:xfrm>
+            <a:off x="822960" y="1828800"/>
+            <a:ext cx="914400" cy="457200"/>
+          </a:xfrm>
+          <a:prstGeom prst="rect">
+            <a:avLst/>
+          </a:prstGeom>
+          <a:noFill/>
+          <a:ln/>
+        </p:spPr>
+        <p:txBody>
+          <a:bodyPr wrap="square" lIns="0" tIns="0" rIns="0" bIns="0" rtlCol="0" anchor="ctr"/>
+          <a:lstStyle/>
+          <a:p>
+            <a:pPr indent="0" marL="0">
+              <a:buNone/>
+            </a:pPr>
+            <a:r>
+              <a:rPr lang="en-US" sz="2800" dirty="0">
+                <a:solidFill>
+                  <a:srgbClr val="A3C1AD"/>
+                </a:solidFill>
+                <a:latin typeface="Georgia" pitchFamily="34" charset="0"/>
+                <a:ea typeface="Georgia" pitchFamily="34" charset="-122"/>
+                <a:cs typeface="Georgia" pitchFamily="34" charset="-120"/>
+              </a:rPr>
+              <a:t>01</a:t>
+            </a:r>
+            <a:endParaRPr lang="en-US" sz="2800" dirty="0"/>
+          </a:p>
+        </p:txBody>
+      </p:sp>
+      <p:sp>
+        <p:nvSpPr>
+          <p:cNvPr id="7" name="Text 5"/>
+          <p:cNvSpPr/>
+          <p:nvPr/>
+        </p:nvSpPr>
+        <p:spPr>
+          <a:xfrm>
+            <a:off x="822960" y="2331720"/>
+            <a:ext cx="3209544" cy="475488"/>
+          </a:xfrm>
+          <a:prstGeom prst="rect">
+            <a:avLst/>
+          </a:prstGeom>
+          <a:noFill/>
+          <a:ln/>
+        </p:spPr>
+        <p:txBody>
+          <a:bodyPr wrap="square" lIns="0" tIns="0" rIns="0" bIns="0" rtlCol="0" anchor="ctr"/>
+          <a:lstStyle/>
+          <a:p>
+            <a:pPr indent="0" marL="0">
+              <a:buNone/>
+            </a:pPr>
+            <a:r>
+              <a:rPr lang="en-US" sz="2200" dirty="0">
+                <a:solidFill>
+                  <a:srgbClr val="4A6B5D"/>
+                </a:solidFill>
+                <a:latin typeface="Georgia" pitchFamily="34" charset="0"/>
+                <a:ea typeface="Georgia" pitchFamily="34" charset="-122"/>
+                <a:cs typeface="Georgia" pitchFamily="34" charset="-120"/>
+              </a:rPr>
+              <a:t>Audio</a:t>
+            </a:r>
+            <a:endParaRPr lang="en-US" sz="2200" dirty="0"/>
+          </a:p>
+        </p:txBody>
+      </p:sp>
+      <p:sp>
+        <p:nvSpPr>
+          <p:cNvPr id="8" name="Shape 6"/>
+          <p:cNvSpPr/>
+          <p:nvPr/>
+        </p:nvSpPr>
+        <p:spPr>
+          <a:xfrm>
+            <a:off x="822960" y="2871216"/>
+            <a:ext cx="3209544" cy="0"/>
+          </a:xfrm>
+          <a:prstGeom prst="line">
+            <a:avLst/>
+          </a:prstGeom>
+          <a:noFill/>
+          <a:ln w="9525">
+            <a:solidFill>
+              <a:srgbClr val="D9D4C4"/>
+            </a:solidFill>
+            <a:prstDash val="solid"/>
+          </a:ln>
+        </p:spPr>
+      </p:sp>
+      <p:sp>
+        <p:nvSpPr>
+          <p:cNvPr id="9" name="Text 7"/>
+          <p:cNvSpPr/>
+          <p:nvPr/>
+        </p:nvSpPr>
+        <p:spPr>
+          <a:xfrm>
+            <a:off x="822960" y="2999232"/>
+            <a:ext cx="3209544" cy="2011680"/>
+          </a:xfrm>
+          <a:prstGeom prst="rect">
+            <a:avLst/>
+          </a:prstGeom>
+          <a:noFill/>
+          <a:ln/>
+        </p:spPr>
+        <p:txBody>
+          <a:bodyPr wrap="square" lIns="0" tIns="0" rIns="0" bIns="0" rtlCol="0" anchor="t"/>
+          <a:lstStyle/>
+          <a:p>
+            <a:pPr indent="0" marL="0">
+              <a:lnSpc>
+                <a:spcPts val="2100"/>
+              </a:lnSpc>
+              <a:buNone/>
+            </a:pPr>
+            <a:r>
+              <a:rPr lang="en-US" sz="1550" dirty="0">
+                <a:solidFill>
+                  <a:srgbClr val="24313F"/>
+                </a:solidFill>
+                <a:latin typeface="Georgia" pitchFamily="34" charset="0"/>
+                <a:ea typeface="Georgia" pitchFamily="34" charset="-122"/>
+                <a:cs typeface="Georgia" pitchFamily="34" charset="-120"/>
+              </a:rPr>
+              <a:t>Twenty seconds of dialogue recorded by the open door, played back on a speaker. Hear the room. Then the rule: monitor every take, and mic as close as the frame allows.</a:t>
+            </a:r>
+            <a:endParaRPr lang="en-US" sz="1550" dirty="0"/>
+          </a:p>
+        </p:txBody>
+      </p:sp>
+      <p:sp>
+        <p:nvSpPr>
+          <p:cNvPr id="10" name="Text 8"/>
+          <p:cNvSpPr/>
+          <p:nvPr/>
+        </p:nvSpPr>
+        <p:spPr>
+          <a:xfrm>
+            <a:off x="4489704" y="1828800"/>
+            <a:ext cx="914400" cy="457200"/>
+          </a:xfrm>
+          <a:prstGeom prst="rect">
+            <a:avLst/>
+          </a:prstGeom>
+          <a:noFill/>
+          <a:ln/>
+        </p:spPr>
+        <p:txBody>
+          <a:bodyPr wrap="square" lIns="0" tIns="0" rIns="0" bIns="0" rtlCol="0" anchor="ctr"/>
+          <a:lstStyle/>
+          <a:p>
+            <a:pPr indent="0" marL="0">
+              <a:buNone/>
+            </a:pPr>
+            <a:r>
+              <a:rPr lang="en-US" sz="2800" dirty="0">
+                <a:solidFill>
+                  <a:srgbClr val="A3C1AD"/>
+                </a:solidFill>
+                <a:latin typeface="Georgia" pitchFamily="34" charset="0"/>
+                <a:ea typeface="Georgia" pitchFamily="34" charset="-122"/>
+                <a:cs typeface="Georgia" pitchFamily="34" charset="-120"/>
+              </a:rPr>
+              <a:t>02</a:t>
+            </a:r>
+            <a:endParaRPr lang="en-US" sz="2800" dirty="0"/>
+          </a:p>
+        </p:txBody>
+      </p:sp>
+      <p:sp>
+        <p:nvSpPr>
+          <p:cNvPr id="11" name="Text 9"/>
+          <p:cNvSpPr/>
+          <p:nvPr/>
+        </p:nvSpPr>
+        <p:spPr>
+          <a:xfrm>
+            <a:off x="4489704" y="2331720"/>
+            <a:ext cx="3209544" cy="475488"/>
+          </a:xfrm>
+          <a:prstGeom prst="rect">
+            <a:avLst/>
+          </a:prstGeom>
+          <a:noFill/>
+          <a:ln/>
+        </p:spPr>
+        <p:txBody>
+          <a:bodyPr wrap="square" lIns="0" tIns="0" rIns="0" bIns="0" rtlCol="0" anchor="ctr"/>
+          <a:lstStyle/>
+          <a:p>
+            <a:pPr indent="0" marL="0">
+              <a:buNone/>
+            </a:pPr>
+            <a:r>
+              <a:rPr lang="en-US" sz="2200" dirty="0">
+                <a:solidFill>
+                  <a:srgbClr val="4A6B5D"/>
+                </a:solidFill>
+                <a:latin typeface="Georgia" pitchFamily="34" charset="0"/>
+                <a:ea typeface="Georgia" pitchFamily="34" charset="-122"/>
+                <a:cs typeface="Georgia" pitchFamily="34" charset="-120"/>
+              </a:rPr>
+              <a:t>Continuity</a:t>
+            </a:r>
+            <a:endParaRPr lang="en-US" sz="2200" dirty="0"/>
+          </a:p>
+        </p:txBody>
+      </p:sp>
+      <p:sp>
+        <p:nvSpPr>
+          <p:cNvPr id="12" name="Shape 10"/>
+          <p:cNvSpPr/>
+          <p:nvPr/>
+        </p:nvSpPr>
+        <p:spPr>
+          <a:xfrm>
+            <a:off x="4489704" y="2871216"/>
+            <a:ext cx="3209544" cy="0"/>
+          </a:xfrm>
+          <a:prstGeom prst="line">
+            <a:avLst/>
+          </a:prstGeom>
+          <a:noFill/>
+          <a:ln w="9525">
+            <a:solidFill>
+              <a:srgbClr val="D9D4C4"/>
+            </a:solidFill>
+            <a:prstDash val="solid"/>
+          </a:ln>
+        </p:spPr>
+      </p:sp>
+      <p:sp>
+        <p:nvSpPr>
+          <p:cNvPr id="13" name="Text 11"/>
+          <p:cNvSpPr/>
+          <p:nvPr/>
+        </p:nvSpPr>
+        <p:spPr>
+          <a:xfrm>
+            <a:off x="4489704" y="2999232"/>
+            <a:ext cx="3209544" cy="2011680"/>
+          </a:xfrm>
+          <a:prstGeom prst="rect">
+            <a:avLst/>
+          </a:prstGeom>
+          <a:noFill/>
+          <a:ln/>
+        </p:spPr>
+        <p:txBody>
+          <a:bodyPr wrap="square" lIns="0" tIns="0" rIns="0" bIns="0" rtlCol="0" anchor="t"/>
+          <a:lstStyle/>
+          <a:p>
+            <a:pPr indent="0" marL="0">
+              <a:lnSpc>
+                <a:spcPts val="2100"/>
+              </a:lnSpc>
+              <a:buNone/>
+            </a:pPr>
+            <a:r>
+              <a:rPr lang="en-US" sz="1550" dirty="0">
+                <a:solidFill>
+                  <a:srgbClr val="24313F"/>
+                </a:solidFill>
+                <a:latin typeface="Georgia" pitchFamily="34" charset="0"/>
+                <a:ea typeface="Georgia" pitchFamily="34" charset="-122"/>
+                <a:cs typeface="Georgia" pitchFamily="34" charset="-120"/>
+              </a:rPr>
+              <a:t>One action, sitting down with a cup, shot wide then close. Find the cut point where the hands match. Cheaper to shoot twice than to repair in the edit.</a:t>
+            </a:r>
+            <a:endParaRPr lang="en-US" sz="1550" dirty="0"/>
+          </a:p>
+        </p:txBody>
+      </p:sp>
+      <p:sp>
+        <p:nvSpPr>
+          <p:cNvPr id="14" name="Text 12"/>
+          <p:cNvSpPr/>
+          <p:nvPr/>
+        </p:nvSpPr>
+        <p:spPr>
+          <a:xfrm>
+            <a:off x="8156448" y="1828800"/>
+            <a:ext cx="914400" cy="457200"/>
+          </a:xfrm>
+          <a:prstGeom prst="rect">
+            <a:avLst/>
+          </a:prstGeom>
+          <a:noFill/>
+          <a:ln/>
+        </p:spPr>
+        <p:txBody>
+          <a:bodyPr wrap="square" lIns="0" tIns="0" rIns="0" bIns="0" rtlCol="0" anchor="ctr"/>
+          <a:lstStyle/>
+          <a:p>
+            <a:pPr indent="0" marL="0">
+              <a:buNone/>
+            </a:pPr>
+            <a:r>
+              <a:rPr lang="en-US" sz="2800" dirty="0">
+                <a:solidFill>
+                  <a:srgbClr val="A3C1AD"/>
+                </a:solidFill>
+                <a:latin typeface="Georgia" pitchFamily="34" charset="0"/>
+                <a:ea typeface="Georgia" pitchFamily="34" charset="-122"/>
+                <a:cs typeface="Georgia" pitchFamily="34" charset="-120"/>
+              </a:rPr>
+              <a:t>03</a:t>
+            </a:r>
+            <a:endParaRPr lang="en-US" sz="2800" dirty="0"/>
+          </a:p>
+        </p:txBody>
+      </p:sp>
+      <p:sp>
+        <p:nvSpPr>
+          <p:cNvPr id="15" name="Text 13"/>
+          <p:cNvSpPr/>
+          <p:nvPr/>
+        </p:nvSpPr>
+        <p:spPr>
+          <a:xfrm>
+            <a:off x="8156448" y="2331720"/>
+            <a:ext cx="3209544" cy="475488"/>
+          </a:xfrm>
+          <a:prstGeom prst="rect">
+            <a:avLst/>
+          </a:prstGeom>
+          <a:noFill/>
+          <a:ln/>
+        </p:spPr>
+        <p:txBody>
+          <a:bodyPr wrap="square" lIns="0" tIns="0" rIns="0" bIns="0" rtlCol="0" anchor="ctr"/>
+          <a:lstStyle/>
+          <a:p>
+            <a:pPr indent="0" marL="0">
+              <a:buNone/>
+            </a:pPr>
+            <a:r>
+              <a:rPr lang="en-US" sz="2200" dirty="0">
+                <a:solidFill>
+                  <a:srgbClr val="4A6B5D"/>
+                </a:solidFill>
+                <a:latin typeface="Georgia" pitchFamily="34" charset="0"/>
+                <a:ea typeface="Georgia" pitchFamily="34" charset="-122"/>
+                <a:cs typeface="Georgia" pitchFamily="34" charset="-120"/>
+              </a:rPr>
+              <a:t>Focus and exposure</a:t>
+            </a:r>
+            <a:endParaRPr lang="en-US" sz="2200" dirty="0"/>
+          </a:p>
+        </p:txBody>
+      </p:sp>
+      <p:sp>
+        <p:nvSpPr>
+          <p:cNvPr id="16" name="Shape 14"/>
+          <p:cNvSpPr/>
+          <p:nvPr/>
+        </p:nvSpPr>
+        <p:spPr>
+          <a:xfrm>
+            <a:off x="8156448" y="2871216"/>
+            <a:ext cx="3209544" cy="0"/>
+          </a:xfrm>
+          <a:prstGeom prst="line">
+            <a:avLst/>
+          </a:prstGeom>
+          <a:noFill/>
+          <a:ln w="9525">
+            <a:solidFill>
+              <a:srgbClr val="D9D4C4"/>
+            </a:solidFill>
+            <a:prstDash val="solid"/>
+          </a:ln>
+        </p:spPr>
+      </p:sp>
+      <p:sp>
+        <p:nvSpPr>
+          <p:cNvPr id="17" name="Text 15"/>
+          <p:cNvSpPr/>
+          <p:nvPr/>
+        </p:nvSpPr>
+        <p:spPr>
+          <a:xfrm>
+            <a:off x="8156448" y="2999232"/>
+            <a:ext cx="3209544" cy="2011680"/>
+          </a:xfrm>
+          <a:prstGeom prst="rect">
+            <a:avLst/>
+          </a:prstGeom>
+          <a:noFill/>
+          <a:ln/>
+        </p:spPr>
+        <p:txBody>
+          <a:bodyPr wrap="square" lIns="0" tIns="0" rIns="0" bIns="0" rtlCol="0" anchor="t"/>
+          <a:lstStyle/>
+          <a:p>
+            <a:pPr indent="0" marL="0">
+              <a:lnSpc>
+                <a:spcPts val="2100"/>
+              </a:lnSpc>
+              <a:buNone/>
+            </a:pPr>
+            <a:r>
+              <a:rPr lang="en-US" sz="1550" dirty="0">
+                <a:solidFill>
+                  <a:srgbClr val="24313F"/>
+                </a:solidFill>
+                <a:latin typeface="Georgia" pitchFamily="34" charset="0"/>
+                <a:ea typeface="Georgia" pitchFamily="34" charset="-122"/>
+                <a:cs typeface="Georgia" pitchFamily="34" charset="-120"/>
+              </a:rPr>
+              <a:t>A face against the bright window. Auto first, then tap to lock. Watch the face go dark, and fix it here rather than on location.</a:t>
+            </a:r>
+            <a:endParaRPr lang="en-US" sz="1550" dirty="0"/>
+          </a:p>
+        </p:txBody>
+      </p:sp>
+      <p:sp>
+        <p:nvSpPr>
+          <p:cNvPr id="18" name="Shape 16"/>
+          <p:cNvSpPr/>
+          <p:nvPr/>
+        </p:nvSpPr>
+        <p:spPr>
+          <a:xfrm>
+            <a:off x="822960" y="5230368"/>
+            <a:ext cx="914400" cy="0"/>
+          </a:xfrm>
+          <a:prstGeom prst="line">
+            <a:avLst/>
+          </a:prstGeom>
+          <a:noFill/>
+          <a:ln w="31750">
+            <a:solidFill>
+              <a:srgbClr val="8C3A38"/>
+            </a:solidFill>
+            <a:prstDash val="solid"/>
+          </a:ln>
+        </p:spPr>
+      </p:sp>
+      <p:sp>
+        <p:nvSpPr>
+          <p:cNvPr id="19" name="Text 17"/>
+          <p:cNvSpPr/>
+          <p:nvPr/>
+        </p:nvSpPr>
+        <p:spPr>
+          <a:xfrm>
+            <a:off x="822960" y="5413248"/>
+            <a:ext cx="10241280" cy="548640"/>
+          </a:xfrm>
+          <a:prstGeom prst="rect">
+            <a:avLst/>
+          </a:prstGeom>
+          <a:noFill/>
+          <a:ln/>
+        </p:spPr>
+        <p:txBody>
+          <a:bodyPr wrap="square" lIns="0" tIns="0" rIns="0" bIns="0" rtlCol="0" anchor="ctr"/>
+          <a:lstStyle/>
+          <a:p>
+            <a:pPr indent="0" marL="0">
+              <a:buNone/>
+            </a:pPr>
+            <a:r>
+              <a:rPr lang="en-US" sz="1250" i="1" dirty="0">
+                <a:solidFill>
+                  <a:srgbClr val="7A7F72"/>
+                </a:solidFill>
+                <a:latin typeface="Arial" pitchFamily="34" charset="0"/>
+                <a:ea typeface="Arial" pitchFamily="34" charset="-122"/>
+                <a:cs typeface="Arial" pitchFamily="34" charset="-120"/>
+              </a:rPr>
+              <a:t>Shot on the kit you will actually use over the break: a school camera signed out, or your own. Log the choice before you leave, and the one mistake your group will police.</a:t>
+            </a:r>
+            <a:endParaRPr lang="en-US" sz="1250" dirty="0"/>
+          </a:p>
+        </p:txBody>
+      </p:sp>
+      <p:sp>
+        <p:nvSpPr>
+          <p:cNvPr id="20" name="Shape 18"/>
+          <p:cNvSpPr/>
+          <p:nvPr/>
+        </p:nvSpPr>
+        <p:spPr>
+          <a:xfrm>
+            <a:off x="822960" y="6382512"/>
+            <a:ext cx="10543032" cy="0"/>
+          </a:xfrm>
+          <a:prstGeom prst="line">
+            <a:avLst/>
+          </a:prstGeom>
+          <a:noFill/>
+          <a:ln w="9525">
+            <a:solidFill>
+              <a:srgbClr val="D9D4C4"/>
+            </a:solidFill>
+            <a:prstDash val="solid"/>
+          </a:ln>
+        </p:spPr>
+      </p:sp>
+      <p:sp>
+        <p:nvSpPr>
+          <p:cNvPr id="21" name="Text 19"/>
+          <p:cNvSpPr/>
+          <p:nvPr/>
+        </p:nvSpPr>
+        <p:spPr>
+          <a:xfrm>
+            <a:off x="822960" y="6419088"/>
+            <a:ext cx="7315200" cy="274320"/>
+          </a:xfrm>
+          <a:prstGeom prst="rect">
+            <a:avLst/>
+          </a:prstGeom>
+          <a:noFill/>
+          <a:ln/>
+        </p:spPr>
+        <p:txBody>
+          <a:bodyPr wrap="square" lIns="0" tIns="0" rIns="0" bIns="0" rtlCol="0" anchor="ctr"/>
+          <a:lstStyle/>
+          <a:p>
+            <a:pPr indent="0" marL="0">
+              <a:buNone/>
+            </a:pPr>
+            <a:r>
+              <a:rPr lang="en-US" sz="900" spc="150" kern="0" dirty="0">
+                <a:solidFill>
+                  <a:srgbClr val="7A7F72"/>
+                </a:solidFill>
+                <a:latin typeface="Arial" pitchFamily="34" charset="0"/>
+                <a:ea typeface="Arial" pitchFamily="34" charset="-122"/>
+                <a:cs typeface="Arial" pitchFamily="34" charset="-120"/>
+              </a:rPr>
+              <a:t>MEDIA STUDIES 9607 · SEMESTER I</a:t>
+            </a:r>
+            <a:endParaRPr lang="en-US" sz="900" dirty="0"/>
+          </a:p>
+        </p:txBody>
+      </p:sp>
+      <p:sp>
+        <p:nvSpPr>
+          <p:cNvPr id="22" name="Text 20"/>
+          <p:cNvSpPr/>
+          <p:nvPr/>
+        </p:nvSpPr>
+        <p:spPr>
+          <a:xfrm>
+            <a:off x="10268712" y="6355080"/>
+            <a:ext cx="1097280" cy="365760"/>
+          </a:xfrm>
+          <a:prstGeom prst="rect">
+            <a:avLst/>
+          </a:prstGeom>
+          <a:noFill/>
+          <a:ln/>
+        </p:spPr>
+        <p:txBody>
+          <a:bodyPr wrap="square" lIns="0" tIns="0" rIns="0" bIns="0" rtlCol="0" anchor="ctr"/>
+          <a:lstStyle/>
+          <a:p>
+            <a:pPr algn="r" indent="0" marL="0">
+              <a:buNone/>
+            </a:pPr>
+            <a:r>
+              <a:rPr lang="en-US" sz="1600" dirty="0">
+                <a:solidFill>
+                  <a:srgbClr val="A3C1AD"/>
+                </a:solidFill>
+                <a:latin typeface="Georgia" pitchFamily="34" charset="0"/>
+                <a:ea typeface="Georgia" pitchFamily="34" charset="-122"/>
+                <a:cs typeface="Georgia" pitchFamily="34" charset="-120"/>
+              </a:rPr>
+              <a:t>05</a:t>
+            </a:r>
+            <a:endParaRPr lang="en-US" sz="1600" dirty="0"/>
+          </a:p>
+        </p:txBody>
+      </p:sp>
+    </p:spTree>
+  </p:cSld>
+  <p:clrMapOvr>
+    <a:masterClrMapping/>
+  </p:clrMapOvr>
+</p:sld>
+</file>
+
+<file path=ppt/slides/slide12.xml><?xml version="1.0" encoding="utf-8"?>
+<p:sld xmlns:a="http://schemas.openxmlformats.org/drawingml/2006/main" xmlns:r="http://schemas.openxmlformats.org/officeDocument/2006/relationships" xmlns:p="http://schemas.openxmlformats.org/presentationml/2006/main">
+  <p:cSld name="Slide 12">
     <p:bg>
       <p:bgPr>
         <a:solidFill>
@@ -2673,7 +3526,7 @@
                 <a:ea typeface="Georgia" pitchFamily="34" charset="-122"/>
                 <a:cs typeface="Georgia" pitchFamily="34" charset="-120"/>
               </a:rPr>
-              <a:t>05</a:t>
+              <a:t>06</a:t>
             </a:r>
             <a:endParaRPr lang="en-US" sz="1600" dirty="0"/>
           </a:p>
@@ -3073,7 +3926,7 @@
       </p:sp>
       <p:pic>
         <p:nvPicPr>
-          <p:cNvPr id="7" name="Image 0" descr="/private/tmp/claude-501/-Users-dogan-Documents-Vaults-Courses/a3a5132d-721f-4cd4-8ddd-e62e2b37b51b/scratchpad/img/vanitas-dutch.jpg">    </p:cNvPr>
+          <p:cNvPr id="7" name="Image 0" descr="/Users/dogan/Documents/Vaults/Courses/wiki/classes/media-studies/decks/_build/img/vanitas-dutch.jpg">    </p:cNvPr>
           <p:cNvPicPr>
             <a:picLocks noChangeAspect="1"/>
           </p:cNvPicPr>
@@ -3122,7 +3975,7 @@
       </p:sp>
       <p:pic>
         <p:nvPicPr>
-          <p:cNvPr id="9" name="Image 1" descr="/private/tmp/claude-501/-Users-dogan-Documents-Vaults-Courses/a3a5132d-721f-4cd4-8ddd-e62e2b37b51b/scratchpad/img/vangogh-skull.jpg">    </p:cNvPr>
+          <p:cNvPr id="9" name="Image 1" descr="/Users/dogan/Documents/Vaults/Courses/wiki/classes/media-studies/decks/_build/img/vangogh-skull.jpg">    </p:cNvPr>
           <p:cNvPicPr>
             <a:picLocks noChangeAspect="1"/>
           </p:cNvPicPr>

--- a/content/decks/media-studies/media-studies-s1-lesson-04-genre-and-camera.pptx
+++ b/content/decks/media-studies/media-studies-s1-lesson-04-genre-and-camera.pptx
@@ -2326,7 +2326,7 @@
                 <a:ea typeface="Georgia" pitchFamily="34" charset="-122"/>
                 <a:cs typeface="Georgia" pitchFamily="34" charset="-120"/>
               </a:rPr>
-              <a:t>From an unlabeled clip, one analytical paragraph in exam register: a genre claim, technical evidence in camera verbs, symbolic evidence, and what the audience is being promised. Marked in the official Paper 2 language so the feedback transfers straight to A1.</a:t>
+              <a:t>From an unlabeled clip, chosen after the Four Corners genre round, one analytical paragraph in exam register: a genre claim, technical evidence in camera verbs, symbolic evidence, and what the audience is being promised. Marked in the official Paper 2 language so the feedback transfers straight to A1.</a:t>
             </a:r>
             <a:endParaRPr lang="en-US" sz="2000" dirty="0"/>
           </a:p>
@@ -4936,7 +4936,7 @@
                 <a:ea typeface="Arial" pitchFamily="34" charset="-122"/>
                 <a:cs typeface="Arial" pitchFamily="34" charset="-120"/>
               </a:rPr>
-              <a:t>C-DRAMA, XIANXIA, HORROR, IDOL VARIETY</a:t>
+              <a:t>HORROR, CRIME DRAMA, SITCOM, DOCUMENTARY</a:t>
             </a:r>
             <a:endParaRPr lang="en-US" sz="1100" dirty="0"/>
           </a:p>
@@ -6909,19 +6909,22 @@
         <p:spPr>
           <a:xfrm>
             <a:off x="822960" y="4754880"/>
-            <a:ext cx="10058400" cy="457200"/>
-          </a:xfrm>
-          <a:prstGeom prst="rect">
-            <a:avLst/>
-          </a:prstGeom>
-          <a:noFill/>
-          <a:ln/>
-        </p:spPr>
-        <p:txBody>
-          <a:bodyPr wrap="square" lIns="0" tIns="0" rIns="0" bIns="0" rtlCol="0" anchor="ctr"/>
-          <a:lstStyle/>
-          <a:p>
-            <a:pPr indent="0" marL="0">
+            <a:ext cx="10058400" cy="731520"/>
+          </a:xfrm>
+          <a:prstGeom prst="rect">
+            <a:avLst/>
+          </a:prstGeom>
+          <a:noFill/>
+          <a:ln/>
+        </p:spPr>
+        <p:txBody>
+          <a:bodyPr wrap="square" lIns="0" tIns="0" rIns="0" bIns="0" rtlCol="0" anchor="t"/>
+          <a:lstStyle/>
+          <a:p>
+            <a:pPr indent="0" marL="0">
+              <a:lnSpc>
+                <a:spcPts val="1900"/>
+              </a:lnSpc>
               <a:buNone/>
             </a:pPr>
             <a:r>
@@ -6933,7 +6936,7 @@
                 <a:ea typeface="Arial" pitchFamily="34" charset="-122"/>
                 <a:cs typeface="Arial" pitchFamily="34" charset="-120"/>
               </a:rPr>
-              <a:t>Name the move, then name what it does to you. The effect is the analysis; the label alone earns nothing.</a:t>
+              <a:t>Name the move, then what it does to you: a Ladder sprint, rungs one to three, a point per verified call. The effect is the analysis; the label alone earns nothing.</a:t>
             </a:r>
             <a:endParaRPr lang="en-US" sz="1400" dirty="0"/>
           </a:p>
